--- a/classes/parte-5-explotacion-de-sistemas-y-binarios/124-return-oriented-programming-rop/clase-124-presentacion.pptx
+++ b/classes/parte-5-explotacion-de-sistemas-y-binarios/124-return-oriented-programming-rop/clase-124-presentacion.pptx
@@ -17,6 +17,9 @@
     <p:sldId id="265" r:id="rId16"/>
     <p:sldId id="266" r:id="rId17"/>
     <p:sldId id="267" r:id="rId18"/>
+    <p:sldId id="268" r:id="rId19"/>
+    <p:sldId id="269" r:id="rId20"/>
+    <p:sldId id="270" r:id="rId21"/>
   </p:sldIdLst>
   <p:sldSz cx="9144000" cy="6858000" type="screen4x3"/>
   <p:notesSz cx="6858000" cy="9144000"/>
@@ -3198,7 +3201,7 @@
                   <a:srgbClr val="0B3D2E"/>
                 </a:solidFill>
               </a:rPr>
-              <a:t>⚠️ Errores comunes</a:t>
+              <a:t>✍️ Ejercicios</a:t>
             </a:r>
           </a:p>
         </p:txBody>
@@ -3236,67 +3239,82 @@
                   <a:srgbClr val="22282E"/>
                 </a:solidFill>
               </a:rPr>
-              <a:t>•  Crash a mitad de cadena — Un gadget tenía efectos colaterales (modifica otro registro)</a:t>
-            </a:r>
-          </a:p>
-          <a:p>
-            <a:pPr>
-              <a:spcAft>
-                <a:spcPts val="600"/>
-              </a:spcAft>
-            </a:pPr>
-            <a:r>
-              <a:rPr sz="1500">
-                <a:solidFill>
-                  <a:srgbClr val="22282E"/>
-                </a:solidFill>
-              </a:rPr>
-              <a:t>•  No hay pop rdx; ret — Usa un gadget compuesto o xor/otro que ponga RDX a 0</a:t>
-            </a:r>
-          </a:p>
-          <a:p>
-            <a:pPr>
-              <a:spcAft>
-                <a:spcPts val="600"/>
-              </a:spcAft>
-            </a:pPr>
-            <a:r>
-              <a:rPr sz="1500">
-                <a:solidFill>
-                  <a:srgbClr val="22282E"/>
-                </a:solidFill>
-              </a:rPr>
-              <a:t>•  /bin/sh no está en el binario — Escríbela en .bss con rop.write</a:t>
-            </a:r>
-          </a:p>
-          <a:p>
-            <a:pPr>
-              <a:spcAft>
-                <a:spcPts val="600"/>
-              </a:spcAft>
-            </a:pPr>
-            <a:r>
-              <a:rPr sz="1500">
-                <a:solidFill>
-                  <a:srgbClr val="22282E"/>
-                </a:solidFill>
-              </a:rPr>
-              <a:t>•  syscall no dispara execve — RAX no vale 59, o argumentos mal ordenados</a:t>
-            </a:r>
-          </a:p>
-          <a:p>
-            <a:pPr>
-              <a:spcAft>
-                <a:spcPts val="600"/>
-              </a:spcAft>
-            </a:pPr>
-            <a:r>
-              <a:rPr sz="1500">
-                <a:solidFill>
-                  <a:srgbClr val="22282E"/>
-                </a:solidFill>
-              </a:rPr>
-              <a:t>•  Cadena demasiado larga para el buffer — Aplica stack pivot a una región mayor</a:t>
+              <a:t>•  Escribe a mano (sin ROP()) la cadena execve y verifícala en GDB.</a:t>
+            </a:r>
+          </a:p>
+          <a:p>
+            <a:pPr>
+              <a:spcAft>
+                <a:spcPts val="600"/>
+              </a:spcAft>
+            </a:pPr>
+            <a:r>
+              <a:rPr sz="1500">
+                <a:solidFill>
+                  <a:srgbClr val="22282E"/>
+                </a:solidFill>
+              </a:rPr>
+              <a:t>•  Usa ropper en lugar de ROPgadget y compara resultados.</a:t>
+            </a:r>
+          </a:p>
+          <a:p>
+            <a:pPr>
+              <a:spcAft>
+                <a:spcPts val="600"/>
+              </a:spcAft>
+            </a:pPr>
+            <a:r>
+              <a:rPr sz="1500">
+                <a:solidFill>
+                  <a:srgbClr val="22282E"/>
+                </a:solidFill>
+              </a:rPr>
+              <a:t>•  Implementa un stack pivot con leave; ret hacia un buffer en .bss.</a:t>
+            </a:r>
+          </a:p>
+          <a:p>
+            <a:pPr>
+              <a:spcAft>
+                <a:spcPts val="600"/>
+              </a:spcAft>
+            </a:pPr>
+            <a:r>
+              <a:rPr sz="1500">
+                <a:solidFill>
+                  <a:srgbClr val="22282E"/>
+                </a:solidFill>
+              </a:rPr>
+              <a:t>•  Construye una cadena que llame a mprotect para hacer ejecutable una región (ret2mprotect).</a:t>
+            </a:r>
+          </a:p>
+          <a:p>
+            <a:pPr>
+              <a:spcAft>
+                <a:spcPts val="600"/>
+              </a:spcAft>
+            </a:pPr>
+            <a:r>
+              <a:rPr sz="1500">
+                <a:solidFill>
+                  <a:srgbClr val="22282E"/>
+                </a:solidFill>
+              </a:rPr>
+              <a:t>•  Explica por qué ROP es Turing-completo con gadgets suficientes.</a:t>
+            </a:r>
+          </a:p>
+          <a:p>
+            <a:pPr>
+              <a:spcAft>
+                <a:spcPts val="600"/>
+              </a:spcAft>
+            </a:pPr>
+            <a:r>
+              <a:rPr sz="1500">
+                <a:solidFill>
+                  <a:srgbClr val="22282E"/>
+                </a:solidFill>
+              </a:rPr>
+              <a:t>•  Mide cuántos gadgets pop necesitas para 4 argumentos de syscall.</a:t>
             </a:r>
           </a:p>
         </p:txBody>
@@ -3347,7 +3365,7 @@
                   <a:srgbClr val="0B3D2E"/>
                 </a:solidFill>
               </a:rPr>
-              <a:t>❓ Preguntas frecuentes</a:t>
+              <a:t>📝 Reto verificable</a:t>
             </a:r>
           </a:p>
         </p:txBody>
@@ -3385,82 +3403,52 @@
                   <a:srgbClr val="22282E"/>
                 </a:solidFill>
               </a:rPr>
-              <a:t>•  ❓ ¿ROP o ret2libc? ret2libc es un caso simple; ROP generaliza a cómputo arbitrario y no depende</a:t>
-            </a:r>
-          </a:p>
-          <a:p>
-            <a:pPr>
-              <a:spcAft>
-                <a:spcPts val="600"/>
-              </a:spcAft>
-            </a:pPr>
-            <a:r>
-              <a:rPr sz="1500">
-                <a:solidFill>
-                  <a:srgbClr val="22282E"/>
-                </a:solidFill>
-              </a:rPr>
-              <a:t>•  de tener system.</a:t>
-            </a:r>
-          </a:p>
-          <a:p>
-            <a:pPr>
-              <a:spcAft>
-                <a:spcPts val="600"/>
-              </a:spcAft>
-            </a:pPr>
-            <a:r>
-              <a:rPr sz="1500">
-                <a:solidFill>
-                  <a:srgbClr val="22282E"/>
-                </a:solidFill>
-              </a:rPr>
-              <a:t>•  ❓ ¿Cómo elijo gadgets sin efectos colaterales? Prefiere los más cortos y revisa cada instrucción</a:t>
-            </a:r>
-          </a:p>
-          <a:p>
-            <a:pPr>
-              <a:spcAft>
-                <a:spcPts val="600"/>
-              </a:spcAft>
-            </a:pPr>
-            <a:r>
-              <a:rPr sz="1500">
-                <a:solidFill>
-                  <a:srgbClr val="22282E"/>
-                </a:solidFill>
-              </a:rPr>
-              <a:t>•  intermedia; los "clean gadgets" son los ideales.</a:t>
-            </a:r>
-          </a:p>
-          <a:p>
-            <a:pPr>
-              <a:spcAft>
-                <a:spcPts val="600"/>
-              </a:spcAft>
-            </a:pPr>
-            <a:r>
-              <a:rPr sz="1500">
-                <a:solidFill>
-                  <a:srgbClr val="22282E"/>
-                </a:solidFill>
-              </a:rPr>
-              <a:t>•  ❓ ¿Sirve ROP contra CFI? Control-Flow Integrity y CET/shadow stacks lo dificultan; es la frontera</a:t>
-            </a:r>
-          </a:p>
-          <a:p>
-            <a:pPr>
-              <a:spcAft>
-                <a:spcPts val="600"/>
-              </a:spcAft>
-            </a:pPr>
-            <a:r>
-              <a:rPr sz="1500">
-                <a:solidFill>
-                  <a:srgbClr val="22282E"/>
-                </a:solidFill>
-              </a:rPr>
-              <a:t>•  actual de la investigación.</a:t>
+              <a:t>•  Entrega un exploit ROP que ejecute execve("/bin/sh", NULL, NULL) mediante syscall contra tu binario</a:t>
+            </a:r>
+          </a:p>
+          <a:p>
+            <a:pPr>
+              <a:spcAft>
+                <a:spcPts val="600"/>
+              </a:spcAft>
+            </a:pPr>
+            <a:r>
+              <a:rPr sz="1500">
+                <a:solidFill>
+                  <a:srgbClr val="22282E"/>
+                </a:solidFill>
+              </a:rPr>
+              <a:t>•  estático, sin usar system de libc.</a:t>
+            </a:r>
+          </a:p>
+          <a:p>
+            <a:pPr>
+              <a:spcAft>
+                <a:spcPts val="600"/>
+              </a:spcAft>
+            </a:pPr>
+            <a:r>
+              <a:rPr sz="1500">
+                <a:solidFill>
+                  <a:srgbClr val="22282E"/>
+                </a:solidFill>
+              </a:rPr>
+              <a:t>•  Criterio de aceptación: obtienes shell interactiva; la cadena incluye gadgets pop rdi/rsi/rdx/rax</a:t>
+            </a:r>
+          </a:p>
+          <a:p>
+            <a:pPr>
+              <a:spcAft>
+                <a:spcPts val="600"/>
+              </a:spcAft>
+            </a:pPr>
+            <a:r>
+              <a:rPr sz="1500">
+                <a:solidFill>
+                  <a:srgbClr val="22282E"/>
+                </a:solidFill>
+              </a:rPr>
+              <a:t>•  y un syscall, verificable en el telescope de la cadena.</a:t>
             </a:r>
           </a:p>
         </p:txBody>
@@ -3511,7 +3499,7 @@
                   <a:srgbClr val="0B3D2E"/>
                 </a:solidFill>
               </a:rPr>
-              <a:t>🔗 Referencias</a:t>
+              <a:t>⚠️ Errores comunes</a:t>
             </a:r>
           </a:p>
         </p:txBody>
@@ -3549,6 +3537,319 @@
                   <a:srgbClr val="22282E"/>
                 </a:solidFill>
               </a:rPr>
+              <a:t>•  Crash a mitad de cadena — Un gadget tenía efectos colaterales (modifica otro registro)</a:t>
+            </a:r>
+          </a:p>
+          <a:p>
+            <a:pPr>
+              <a:spcAft>
+                <a:spcPts val="600"/>
+              </a:spcAft>
+            </a:pPr>
+            <a:r>
+              <a:rPr sz="1500">
+                <a:solidFill>
+                  <a:srgbClr val="22282E"/>
+                </a:solidFill>
+              </a:rPr>
+              <a:t>•  No hay pop rdx; ret — Usa un gadget compuesto o xor/otro que ponga RDX a 0</a:t>
+            </a:r>
+          </a:p>
+          <a:p>
+            <a:pPr>
+              <a:spcAft>
+                <a:spcPts val="600"/>
+              </a:spcAft>
+            </a:pPr>
+            <a:r>
+              <a:rPr sz="1500">
+                <a:solidFill>
+                  <a:srgbClr val="22282E"/>
+                </a:solidFill>
+              </a:rPr>
+              <a:t>•  /bin/sh no está en el binario — Escríbela en .bss con rop.write</a:t>
+            </a:r>
+          </a:p>
+          <a:p>
+            <a:pPr>
+              <a:spcAft>
+                <a:spcPts val="600"/>
+              </a:spcAft>
+            </a:pPr>
+            <a:r>
+              <a:rPr sz="1500">
+                <a:solidFill>
+                  <a:srgbClr val="22282E"/>
+                </a:solidFill>
+              </a:rPr>
+              <a:t>•  syscall no dispara execve — RAX no vale 59, o argumentos mal ordenados</a:t>
+            </a:r>
+          </a:p>
+          <a:p>
+            <a:pPr>
+              <a:spcAft>
+                <a:spcPts val="600"/>
+              </a:spcAft>
+            </a:pPr>
+            <a:r>
+              <a:rPr sz="1500">
+                <a:solidFill>
+                  <a:srgbClr val="22282E"/>
+                </a:solidFill>
+              </a:rPr>
+              <a:t>•  Cadena demasiado larga para el buffer — Aplica stack pivot a una región mayor</a:t>
+            </a:r>
+          </a:p>
+        </p:txBody>
+      </p:sp>
+    </p:spTree>
+  </p:cSld>
+  <p:clrMapOvr>
+    <a:masterClrMapping/>
+  </p:clrMapOvr>
+</p:sld>
+</file>
+
+<file path=ppt/slides/slide13.xml><?xml version="1.0" encoding="utf-8"?>
+<p:sld xmlns:a="http://schemas.openxmlformats.org/drawingml/2006/main" xmlns:p="http://schemas.openxmlformats.org/presentationml/2006/main" xmlns:r="http://schemas.openxmlformats.org/officeDocument/2006/relationships">
+  <p:cSld>
+    <p:spTree>
+      <p:nvGrpSpPr>
+        <p:cNvPr id="1" name=""/>
+        <p:cNvGrpSpPr/>
+        <p:nvPr/>
+      </p:nvGrpSpPr>
+      <p:grpSpPr/>
+      <p:sp>
+        <p:nvSpPr>
+          <p:cNvPr id="2" name="TextBox 1"/>
+          <p:cNvSpPr txBox="1"/>
+          <p:nvPr/>
+        </p:nvSpPr>
+        <p:spPr>
+          <a:xfrm>
+            <a:off x="457200" y="320040"/>
+            <a:ext cx="8229600" cy="822960"/>
+          </a:xfrm>
+          <a:prstGeom prst="rect">
+            <a:avLst/>
+          </a:prstGeom>
+          <a:noFill/>
+        </p:spPr>
+        <p:txBody>
+          <a:bodyPr wrap="square">
+            <a:spAutoFit/>
+          </a:bodyPr>
+          <a:lstStyle/>
+          <a:p>
+            <a:r>
+              <a:rPr sz="2600" b="1">
+                <a:solidFill>
+                  <a:srgbClr val="0B3D2E"/>
+                </a:solidFill>
+              </a:rPr>
+              <a:t>❓ Preguntas frecuentes</a:t>
+            </a:r>
+          </a:p>
+        </p:txBody>
+      </p:sp>
+      <p:sp>
+        <p:nvSpPr>
+          <p:cNvPr id="3" name="TextBox 2"/>
+          <p:cNvSpPr txBox="1"/>
+          <p:nvPr/>
+        </p:nvSpPr>
+        <p:spPr>
+          <a:xfrm>
+            <a:off x="457200" y="1280160"/>
+            <a:ext cx="8229600" cy="4937760"/>
+          </a:xfrm>
+          <a:prstGeom prst="rect">
+            <a:avLst/>
+          </a:prstGeom>
+          <a:noFill/>
+        </p:spPr>
+        <p:txBody>
+          <a:bodyPr wrap="square">
+            <a:spAutoFit/>
+          </a:bodyPr>
+          <a:lstStyle/>
+          <a:p>
+            <a:pPr>
+              <a:spcAft>
+                <a:spcPts val="600"/>
+              </a:spcAft>
+            </a:pPr>
+            <a:r>
+              <a:rPr sz="1500">
+                <a:solidFill>
+                  <a:srgbClr val="22282E"/>
+                </a:solidFill>
+              </a:rPr>
+              <a:t>•  ❓ ¿ROP o ret2libc? ret2libc es un caso simple; ROP generaliza a cómputo arbitrario y no depende</a:t>
+            </a:r>
+          </a:p>
+          <a:p>
+            <a:pPr>
+              <a:spcAft>
+                <a:spcPts val="600"/>
+              </a:spcAft>
+            </a:pPr>
+            <a:r>
+              <a:rPr sz="1500">
+                <a:solidFill>
+                  <a:srgbClr val="22282E"/>
+                </a:solidFill>
+              </a:rPr>
+              <a:t>•  de tener system.</a:t>
+            </a:r>
+          </a:p>
+          <a:p>
+            <a:pPr>
+              <a:spcAft>
+                <a:spcPts val="600"/>
+              </a:spcAft>
+            </a:pPr>
+            <a:r>
+              <a:rPr sz="1500">
+                <a:solidFill>
+                  <a:srgbClr val="22282E"/>
+                </a:solidFill>
+              </a:rPr>
+              <a:t>•  ❓ ¿Cómo elijo gadgets sin efectos colaterales? Prefiere los más cortos y revisa cada instrucción</a:t>
+            </a:r>
+          </a:p>
+          <a:p>
+            <a:pPr>
+              <a:spcAft>
+                <a:spcPts val="600"/>
+              </a:spcAft>
+            </a:pPr>
+            <a:r>
+              <a:rPr sz="1500">
+                <a:solidFill>
+                  <a:srgbClr val="22282E"/>
+                </a:solidFill>
+              </a:rPr>
+              <a:t>•  intermedia; los "clean gadgets" son los ideales.</a:t>
+            </a:r>
+          </a:p>
+          <a:p>
+            <a:pPr>
+              <a:spcAft>
+                <a:spcPts val="600"/>
+              </a:spcAft>
+            </a:pPr>
+            <a:r>
+              <a:rPr sz="1500">
+                <a:solidFill>
+                  <a:srgbClr val="22282E"/>
+                </a:solidFill>
+              </a:rPr>
+              <a:t>•  ❓ ¿Sirve ROP contra CFI? Control-Flow Integrity y CET/shadow stacks lo dificultan; es la frontera</a:t>
+            </a:r>
+          </a:p>
+          <a:p>
+            <a:pPr>
+              <a:spcAft>
+                <a:spcPts val="600"/>
+              </a:spcAft>
+            </a:pPr>
+            <a:r>
+              <a:rPr sz="1500">
+                <a:solidFill>
+                  <a:srgbClr val="22282E"/>
+                </a:solidFill>
+              </a:rPr>
+              <a:t>•  actual de la investigación.</a:t>
+            </a:r>
+          </a:p>
+        </p:txBody>
+      </p:sp>
+    </p:spTree>
+  </p:cSld>
+  <p:clrMapOvr>
+    <a:masterClrMapping/>
+  </p:clrMapOvr>
+</p:sld>
+</file>
+
+<file path=ppt/slides/slide14.xml><?xml version="1.0" encoding="utf-8"?>
+<p:sld xmlns:a="http://schemas.openxmlformats.org/drawingml/2006/main" xmlns:p="http://schemas.openxmlformats.org/presentationml/2006/main" xmlns:r="http://schemas.openxmlformats.org/officeDocument/2006/relationships">
+  <p:cSld>
+    <p:spTree>
+      <p:nvGrpSpPr>
+        <p:cNvPr id="1" name=""/>
+        <p:cNvGrpSpPr/>
+        <p:nvPr/>
+      </p:nvGrpSpPr>
+      <p:grpSpPr/>
+      <p:sp>
+        <p:nvSpPr>
+          <p:cNvPr id="2" name="TextBox 1"/>
+          <p:cNvSpPr txBox="1"/>
+          <p:nvPr/>
+        </p:nvSpPr>
+        <p:spPr>
+          <a:xfrm>
+            <a:off x="457200" y="320040"/>
+            <a:ext cx="8229600" cy="822960"/>
+          </a:xfrm>
+          <a:prstGeom prst="rect">
+            <a:avLst/>
+          </a:prstGeom>
+          <a:noFill/>
+        </p:spPr>
+        <p:txBody>
+          <a:bodyPr wrap="square">
+            <a:spAutoFit/>
+          </a:bodyPr>
+          <a:lstStyle/>
+          <a:p>
+            <a:r>
+              <a:rPr sz="2600" b="1">
+                <a:solidFill>
+                  <a:srgbClr val="0B3D2E"/>
+                </a:solidFill>
+              </a:rPr>
+              <a:t>🔗 Referencias</a:t>
+            </a:r>
+          </a:p>
+        </p:txBody>
+      </p:sp>
+      <p:sp>
+        <p:nvSpPr>
+          <p:cNvPr id="3" name="TextBox 2"/>
+          <p:cNvSpPr txBox="1"/>
+          <p:nvPr/>
+        </p:nvSpPr>
+        <p:spPr>
+          <a:xfrm>
+            <a:off x="457200" y="1280160"/>
+            <a:ext cx="8229600" cy="4937760"/>
+          </a:xfrm>
+          <a:prstGeom prst="rect">
+            <a:avLst/>
+          </a:prstGeom>
+          <a:noFill/>
+        </p:spPr>
+        <p:txBody>
+          <a:bodyPr wrap="square">
+            <a:spAutoFit/>
+          </a:bodyPr>
+          <a:lstStyle/>
+          <a:p>
+            <a:pPr>
+              <a:spcAft>
+                <a:spcPts val="600"/>
+              </a:spcAft>
+            </a:pPr>
+            <a:r>
+              <a:rPr sz="1500">
+                <a:solidFill>
+                  <a:srgbClr val="22282E"/>
+                </a:solidFill>
+              </a:rPr>
               <a:t>•  Shacham, H. "The Geometry of Innocent Flesh on the Bone: Return-into-libc without Function Calls" (CCS 2007).</a:t>
             </a:r>
           </a:p>
@@ -3599,6 +3900,81 @@
           </a:p>
         </p:txBody>
       </p:sp>
+    </p:spTree>
+  </p:cSld>
+  <p:clrMapOvr>
+    <a:masterClrMapping/>
+  </p:clrMapOvr>
+</p:sld>
+</file>
+
+<file path=ppt/slides/slide15.xml><?xml version="1.0" encoding="utf-8"?>
+<p:sld xmlns:a="http://schemas.openxmlformats.org/drawingml/2006/main" xmlns:p="http://schemas.openxmlformats.org/presentationml/2006/main" xmlns:r="http://schemas.openxmlformats.org/officeDocument/2006/relationships">
+  <p:cSld>
+    <p:spTree>
+      <p:nvGrpSpPr>
+        <p:cNvPr id="1" name=""/>
+        <p:cNvGrpSpPr/>
+        <p:nvPr/>
+      </p:nvGrpSpPr>
+      <p:grpSpPr/>
+      <p:sp>
+        <p:nvSpPr>
+          <p:cNvPr id="2" name="TextBox 1"/>
+          <p:cNvSpPr txBox="1"/>
+          <p:nvPr/>
+        </p:nvSpPr>
+        <p:spPr>
+          <a:xfrm>
+            <a:off x="457200" y="274320"/>
+            <a:ext cx="8229600" cy="640080"/>
+          </a:xfrm>
+          <a:prstGeom prst="rect">
+            <a:avLst/>
+          </a:prstGeom>
+          <a:noFill/>
+        </p:spPr>
+        <p:txBody>
+          <a:bodyPr wrap="square">
+            <a:spAutoFit/>
+          </a:bodyPr>
+          <a:lstStyle/>
+          <a:p>
+            <a:r>
+              <a:rPr sz="2200" b="1">
+                <a:solidFill>
+                  <a:srgbClr val="0B3D2E"/>
+                </a:solidFill>
+              </a:rPr>
+              <a:t>Diagrama de la clase</a:t>
+            </a:r>
+          </a:p>
+        </p:txBody>
+      </p:sp>
+      <p:pic>
+        <p:nvPicPr>
+          <p:cNvPr id="3" name="Picture 2" descr="ecb4abab8ae7d4e1.png"/>
+          <p:cNvPicPr>
+            <a:picLocks noChangeAspect="1"/>
+          </p:cNvPicPr>
+          <p:nvPr/>
+        </p:nvPicPr>
+        <p:blipFill>
+          <a:blip r:embed="rId2"/>
+          <a:stretch>
+            <a:fillRect/>
+          </a:stretch>
+        </p:blipFill>
+        <p:spPr>
+          <a:xfrm>
+            <a:off x="3673981" y="1097280"/>
+            <a:ext cx="1796038" cy="5303520"/>
+          </a:xfrm>
+          <a:prstGeom prst="rect">
+            <a:avLst/>
+          </a:prstGeom>
+        </p:spPr>
+      </p:pic>
     </p:spTree>
   </p:cSld>
   <p:clrMapOvr>
@@ -4122,7 +4498,7 @@
                   <a:srgbClr val="0B3D2E"/>
                 </a:solidFill>
               </a:rPr>
-              <a:t>📖 Definiciones y características</a:t>
+              <a:t>🧠 Explicación en profundidad</a:t>
             </a:r>
           </a:p>
         </p:txBody>
@@ -4160,97 +4536,97 @@
                   <a:srgbClr val="22282E"/>
                 </a:solidFill>
               </a:rPr>
-              <a:t>•  Gadget: secuencia corta de instrucciones que finaliza en ret (o jmp/call controlado).</a:t>
-            </a:r>
-          </a:p>
-          <a:p>
-            <a:pPr>
-              <a:spcAft>
-                <a:spcPts val="600"/>
-              </a:spcAft>
-            </a:pPr>
-            <a:r>
-              <a:rPr sz="1500">
-                <a:solidFill>
-                  <a:srgbClr val="22282E"/>
-                </a:solidFill>
-              </a:rPr>
-              <a:t>•  Clave: pop rdi; ret carga un valor y devuelve el control a la cadena.</a:t>
-            </a:r>
-          </a:p>
-          <a:p>
-            <a:pPr>
-              <a:spcAft>
-                <a:spcPts val="600"/>
-              </a:spcAft>
-            </a:pPr>
-            <a:r>
-              <a:rPr sz="1500">
-                <a:solidFill>
-                  <a:srgbClr val="22282E"/>
-                </a:solidFill>
-              </a:rPr>
-              <a:t>•  Cadena ROP: lista de direcciones de gadgets (y datos) colocada en el stack. Clave: cada ret</a:t>
-            </a:r>
-          </a:p>
-          <a:p>
-            <a:pPr>
-              <a:spcAft>
-                <a:spcPts val="600"/>
-              </a:spcAft>
-            </a:pPr>
-            <a:r>
-              <a:rPr sz="1500">
-                <a:solidFill>
-                  <a:srgbClr val="22282E"/>
-                </a:solidFill>
-              </a:rPr>
-              <a:t>•  toma la siguiente dirección del stack.</a:t>
-            </a:r>
-          </a:p>
-          <a:p>
-            <a:pPr>
-              <a:spcAft>
-                <a:spcPts val="600"/>
-              </a:spcAft>
-            </a:pPr>
-            <a:r>
-              <a:rPr sz="1500">
-                <a:solidFill>
-                  <a:srgbClr val="22282E"/>
-                </a:solidFill>
-              </a:rPr>
-              <a:t>•  ret2syscall: cadena que prepara RAX/RDI/RSI/RDX y ejecuta syscall para execve("/bin/sh").</a:t>
-            </a:r>
-          </a:p>
-          <a:p>
-            <a:pPr>
-              <a:spcAft>
-                <a:spcPts val="600"/>
-              </a:spcAft>
-            </a:pPr>
-            <a:r>
-              <a:rPr sz="1500">
-                <a:solidFill>
-                  <a:srgbClr val="22282E"/>
-                </a:solidFill>
-              </a:rPr>
-              <a:t>•  Clave: no necesita system de libc.</a:t>
-            </a:r>
-          </a:p>
-          <a:p>
-            <a:pPr>
-              <a:spcAft>
-                <a:spcPts val="600"/>
-              </a:spcAft>
-            </a:pPr>
-            <a:r>
-              <a:rPr sz="1500">
-                <a:solidFill>
-                  <a:srgbClr val="22282E"/>
-                </a:solidFill>
-              </a:rPr>
-              <a:t>•  Stack pivot: gadget que mueve RSP a memoria controlada (xchg rsp, rax, leave; ret).</a:t>
+              <a:t>•  El Return-Oriented Programming es la generalización de ret2libc y la técnica que define la</a:t>
+            </a:r>
+          </a:p>
+          <a:p>
+            <a:pPr>
+              <a:spcAft>
+                <a:spcPts val="600"/>
+              </a:spcAft>
+            </a:pPr>
+            <a:r>
+              <a:rPr sz="1500">
+                <a:solidFill>
+                  <a:srgbClr val="22282E"/>
+                </a:solidFill>
+              </a:rPr>
+              <a:t>•  explotación moderna. La idea es radical: en lugar de saltar a una función existente, el atacante</a:t>
+            </a:r>
+          </a:p>
+          <a:p>
+            <a:pPr>
+              <a:spcAft>
+                <a:spcPts val="600"/>
+              </a:spcAft>
+            </a:pPr>
+            <a:r>
+              <a:rPr sz="1500">
+                <a:solidFill>
+                  <a:srgbClr val="22282E"/>
+                </a:solidFill>
+              </a:rPr>
+              <a:t>•  encadena decenas de gadgets —fragmentos cortos de código que ya están en el binario y terminan</a:t>
+            </a:r>
+          </a:p>
+          <a:p>
+            <a:pPr>
+              <a:spcAft>
+                <a:spcPts val="600"/>
+              </a:spcAft>
+            </a:pPr>
+            <a:r>
+              <a:rPr sz="1500">
+                <a:solidFill>
+                  <a:srgbClr val="22282E"/>
+                </a:solidFill>
+              </a:rPr>
+              <a:t>•  en ret— para construir cualquier comportamiento que quiera, instrucción a instrucción, sin</a:t>
+            </a:r>
+          </a:p>
+          <a:p>
+            <a:pPr>
+              <a:spcAft>
+                <a:spcPts val="600"/>
+              </a:spcAft>
+            </a:pPr>
+            <a:r>
+              <a:rPr sz="1500">
+                <a:solidFill>
+                  <a:srgbClr val="22282E"/>
+                </a:solidFill>
+              </a:rPr>
+              <a:t>•  inyectar un solo byte de código nuevo. Como el código reutilizado ya es ejecutable, ROP derrota</a:t>
+            </a:r>
+          </a:p>
+          <a:p>
+            <a:pPr>
+              <a:spcAft>
+                <a:spcPts val="600"/>
+              </a:spcAft>
+            </a:pPr>
+            <a:r>
+              <a:rPr sz="1500">
+                <a:solidFill>
+                  <a:srgbClr val="22282E"/>
+                </a:solidFill>
+              </a:rPr>
+              <a:t>•  por completo a DEP/NX: no hay nada que ejecutar en una región no ejecutable, solo saltos a código</a:t>
+            </a:r>
+          </a:p>
+          <a:p>
+            <a:pPr>
+              <a:spcAft>
+                <a:spcPts val="600"/>
+              </a:spcAft>
+            </a:pPr>
+            <a:r>
+              <a:rPr sz="1500">
+                <a:solidFill>
+                  <a:srgbClr val="22282E"/>
+                </a:solidFill>
+              </a:rPr>
+              <a:t>•  que siempre lo fue.</a:t>
             </a:r>
           </a:p>
         </p:txBody>
@@ -4301,7 +4677,7 @@
                   <a:srgbClr val="0B3D2E"/>
                 </a:solidFill>
               </a:rPr>
-              <a:t>🧰 Herramientas y preparación</a:t>
+              <a:t>📖 Definiciones y características</a:t>
             </a:r>
           </a:p>
         </p:txBody>
@@ -4339,37 +4715,97 @@
                   <a:srgbClr val="22282E"/>
                 </a:solidFill>
               </a:rPr>
-              <a:t>•  pip install pwntools ROPgadget ropper</a:t>
-            </a:r>
-          </a:p>
-          <a:p>
-            <a:pPr>
-              <a:spcAft>
-                <a:spcPts val="600"/>
-              </a:spcAft>
-            </a:pPr>
-            <a:r>
-              <a:rPr sz="1500">
-                <a:solidFill>
-                  <a:srgbClr val="22282E"/>
-                </a:solidFill>
-              </a:rPr>
-              <a:t>•  sudo apt install -y gdb</a:t>
-            </a:r>
-          </a:p>
-          <a:p>
-            <a:pPr>
-              <a:spcAft>
-                <a:spcPts val="600"/>
-              </a:spcAft>
-            </a:pPr>
-            <a:r>
-              <a:rPr sz="1500">
-                <a:solidFill>
-                  <a:srgbClr val="22282E"/>
-                </a:solidFill>
-              </a:rPr>
-              <a:t>•  Usa un binario estático o con NX activo para practicar (gcc -static -fno-stack-protector -no-pie).</a:t>
+              <a:t>•  Gadget: secuencia corta de instrucciones que finaliza en ret (o jmp/call controlado).</a:t>
+            </a:r>
+          </a:p>
+          <a:p>
+            <a:pPr>
+              <a:spcAft>
+                <a:spcPts val="600"/>
+              </a:spcAft>
+            </a:pPr>
+            <a:r>
+              <a:rPr sz="1500">
+                <a:solidFill>
+                  <a:srgbClr val="22282E"/>
+                </a:solidFill>
+              </a:rPr>
+              <a:t>•  Clave: pop rdi; ret carga un valor y devuelve el control a la cadena.</a:t>
+            </a:r>
+          </a:p>
+          <a:p>
+            <a:pPr>
+              <a:spcAft>
+                <a:spcPts val="600"/>
+              </a:spcAft>
+            </a:pPr>
+            <a:r>
+              <a:rPr sz="1500">
+                <a:solidFill>
+                  <a:srgbClr val="22282E"/>
+                </a:solidFill>
+              </a:rPr>
+              <a:t>•  Cadena ROP: lista de direcciones de gadgets (y datos) colocada en el stack. Clave: cada ret</a:t>
+            </a:r>
+          </a:p>
+          <a:p>
+            <a:pPr>
+              <a:spcAft>
+                <a:spcPts val="600"/>
+              </a:spcAft>
+            </a:pPr>
+            <a:r>
+              <a:rPr sz="1500">
+                <a:solidFill>
+                  <a:srgbClr val="22282E"/>
+                </a:solidFill>
+              </a:rPr>
+              <a:t>•  toma la siguiente dirección del stack.</a:t>
+            </a:r>
+          </a:p>
+          <a:p>
+            <a:pPr>
+              <a:spcAft>
+                <a:spcPts val="600"/>
+              </a:spcAft>
+            </a:pPr>
+            <a:r>
+              <a:rPr sz="1500">
+                <a:solidFill>
+                  <a:srgbClr val="22282E"/>
+                </a:solidFill>
+              </a:rPr>
+              <a:t>•  ret2syscall: cadena que prepara RAX/RDI/RSI/RDX y ejecuta syscall para execve("/bin/sh").</a:t>
+            </a:r>
+          </a:p>
+          <a:p>
+            <a:pPr>
+              <a:spcAft>
+                <a:spcPts val="600"/>
+              </a:spcAft>
+            </a:pPr>
+            <a:r>
+              <a:rPr sz="1500">
+                <a:solidFill>
+                  <a:srgbClr val="22282E"/>
+                </a:solidFill>
+              </a:rPr>
+              <a:t>•  Clave: no necesita system de libc.</a:t>
+            </a:r>
+          </a:p>
+          <a:p>
+            <a:pPr>
+              <a:spcAft>
+                <a:spcPts val="600"/>
+              </a:spcAft>
+            </a:pPr>
+            <a:r>
+              <a:rPr sz="1500">
+                <a:solidFill>
+                  <a:srgbClr val="22282E"/>
+                </a:solidFill>
+              </a:rPr>
+              <a:t>•  Stack pivot: gadget que mueve RSP a memoria controlada (xchg rsp, rax, leave; ret).</a:t>
             </a:r>
           </a:p>
         </p:txBody>
@@ -4420,7 +4856,7 @@
                   <a:srgbClr val="0B3D2E"/>
                 </a:solidFill>
               </a:rPr>
-              <a:t>🧪 Laboratorio guiado</a:t>
+              <a:t>📔 Glosario</a:t>
             </a:r>
           </a:p>
         </p:txBody>
@@ -4458,97 +4894,97 @@
                   <a:srgbClr val="22282E"/>
                 </a:solidFill>
               </a:rPr>
-              <a:t>•  Compila un objetivo con muchos gadgets (binario estático):</a:t>
-            </a:r>
-          </a:p>
-          <a:p>
-            <a:pPr>
-              <a:spcAft>
-                <a:spcPts val="600"/>
-              </a:spcAft>
-            </a:pPr>
-            <a:r>
-              <a:rPr sz="1500">
-                <a:solidFill>
-                  <a:srgbClr val="22282E"/>
-                </a:solidFill>
-              </a:rPr>
-              <a:t>•  gcc -static -no-pie -fno-stack-protector vuln.c -o ropme</a:t>
-            </a:r>
-          </a:p>
-          <a:p>
-            <a:pPr>
-              <a:spcAft>
-                <a:spcPts val="600"/>
-              </a:spcAft>
-            </a:pPr>
-            <a:r>
-              <a:rPr sz="1500">
-                <a:solidFill>
-                  <a:srgbClr val="22282E"/>
-                </a:solidFill>
-              </a:rPr>
-              <a:t>•  checksec ./ropme</a:t>
-            </a:r>
-          </a:p>
-          <a:p>
-            <a:pPr>
-              <a:spcAft>
-                <a:spcPts val="600"/>
-              </a:spcAft>
-            </a:pPr>
-            <a:r>
-              <a:rPr sz="1500">
-                <a:solidFill>
-                  <a:srgbClr val="22282E"/>
-                </a:solidFill>
-              </a:rPr>
-              <a:t>•  Busca gadgets clave:</a:t>
-            </a:r>
-          </a:p>
-          <a:p>
-            <a:pPr>
-              <a:spcAft>
-                <a:spcPts val="600"/>
-              </a:spcAft>
-            </a:pPr>
-            <a:r>
-              <a:rPr sz="1500">
-                <a:solidFill>
-                  <a:srgbClr val="22282E"/>
-                </a:solidFill>
-              </a:rPr>
-              <a:t>•  ROPgadget --binary ropme | grep -E ": pop rdi ; ret|: pop rsi ; ret|: pop rdx ; ret|: syscall"</a:t>
-            </a:r>
-          </a:p>
-          <a:p>
-            <a:pPr>
-              <a:spcAft>
-                <a:spcPts val="600"/>
-              </a:spcAft>
-            </a:pPr>
-            <a:r>
-              <a:rPr sz="1500">
-                <a:solidFill>
-                  <a:srgbClr val="22282E"/>
-                </a:solidFill>
-              </a:rPr>
-              <a:t>•  ROPgadget --binary ropme --string '/bin/sh'   # o coloca tú la cadena en .bss</a:t>
-            </a:r>
-          </a:p>
-          <a:p>
-            <a:pPr>
-              <a:spcAft>
-                <a:spcPts val="600"/>
-              </a:spcAft>
-            </a:pPr>
-            <a:r>
-              <a:rPr sz="1500">
-                <a:solidFill>
-                  <a:srgbClr val="22282E"/>
-                </a:solidFill>
-              </a:rPr>
-              <a:t>•  Construye una cadena execve("/bin/sh", 0, 0) a mano:</a:t>
+              <a:t>•  Término — Definición concisa</a:t>
+            </a:r>
+          </a:p>
+          <a:p>
+            <a:pPr>
+              <a:spcAft>
+                <a:spcPts val="600"/>
+              </a:spcAft>
+            </a:pPr>
+            <a:r>
+              <a:rPr sz="1500">
+                <a:solidFill>
+                  <a:srgbClr val="22282E"/>
+                </a:solidFill>
+              </a:rPr>
+              <a:t>•  ROP — Encadenar gadgets existentes para construir comportamiento</a:t>
+            </a:r>
+          </a:p>
+          <a:p>
+            <a:pPr>
+              <a:spcAft>
+                <a:spcPts val="600"/>
+              </a:spcAft>
+            </a:pPr>
+            <a:r>
+              <a:rPr sz="1500">
+                <a:solidFill>
+                  <a:srgbClr val="22282E"/>
+                </a:solidFill>
+              </a:rPr>
+              <a:t>•  Gadget — Secuencia corta que termina en ret</a:t>
+            </a:r>
+          </a:p>
+          <a:p>
+            <a:pPr>
+              <a:spcAft>
+                <a:spcPts val="600"/>
+              </a:spcAft>
+            </a:pPr>
+            <a:r>
+              <a:rPr sz="1500">
+                <a:solidFill>
+                  <a:srgbClr val="22282E"/>
+                </a:solidFill>
+              </a:rPr>
+              <a:t>•  ret como pegamento — Cada ret salta al siguiente gadget de la pila</a:t>
+            </a:r>
+          </a:p>
+          <a:p>
+            <a:pPr>
+              <a:spcAft>
+                <a:spcPts val="600"/>
+              </a:spcAft>
+            </a:pPr>
+            <a:r>
+              <a:rPr sz="1500">
+                <a:solidFill>
+                  <a:srgbClr val="22282E"/>
+                </a:solidFill>
+              </a:rPr>
+              <a:t>•  Pila como programa — La pila contiene la lista de direcciones de gadgets</a:t>
+            </a:r>
+          </a:p>
+          <a:p>
+            <a:pPr>
+              <a:spcAft>
+                <a:spcPts val="600"/>
+              </a:spcAft>
+            </a:pPr>
+            <a:r>
+              <a:rPr sz="1500">
+                <a:solidFill>
+                  <a:srgbClr val="22282E"/>
+                </a:solidFill>
+              </a:rPr>
+              <a:t>•  Turing-completitud — Con suficientes gadgets se computa cualquier cosa</a:t>
+            </a:r>
+          </a:p>
+          <a:p>
+            <a:pPr>
+              <a:spcAft>
+                <a:spcPts val="600"/>
+              </a:spcAft>
+            </a:pPr>
+            <a:r>
+              <a:rPr sz="1500">
+                <a:solidFill>
+                  <a:srgbClr val="22282E"/>
+                </a:solidFill>
+              </a:rPr>
+              <a:t>•  Derrota a NX — Reutiliza código ya ejecutable; no inyecta nada</a:t>
             </a:r>
           </a:p>
         </p:txBody>
@@ -4599,7 +5035,7 @@
                   <a:srgbClr val="0B3D2E"/>
                 </a:solidFill>
               </a:rPr>
-              <a:t>✍️ Ejercicios</a:t>
+              <a:t>🧰 Herramientas y preparación</a:t>
             </a:r>
           </a:p>
         </p:txBody>
@@ -4637,82 +5073,7 @@
                   <a:srgbClr val="22282E"/>
                 </a:solidFill>
               </a:rPr>
-              <a:t>•  Escribe a mano (sin ROP()) la cadena execve y verifícala en GDB.</a:t>
-            </a:r>
-          </a:p>
-          <a:p>
-            <a:pPr>
-              <a:spcAft>
-                <a:spcPts val="600"/>
-              </a:spcAft>
-            </a:pPr>
-            <a:r>
-              <a:rPr sz="1500">
-                <a:solidFill>
-                  <a:srgbClr val="22282E"/>
-                </a:solidFill>
-              </a:rPr>
-              <a:t>•  Usa ropper en lugar de ROPgadget y compara resultados.</a:t>
-            </a:r>
-          </a:p>
-          <a:p>
-            <a:pPr>
-              <a:spcAft>
-                <a:spcPts val="600"/>
-              </a:spcAft>
-            </a:pPr>
-            <a:r>
-              <a:rPr sz="1500">
-                <a:solidFill>
-                  <a:srgbClr val="22282E"/>
-                </a:solidFill>
-              </a:rPr>
-              <a:t>•  Implementa un stack pivot con leave; ret hacia un buffer en .bss.</a:t>
-            </a:r>
-          </a:p>
-          <a:p>
-            <a:pPr>
-              <a:spcAft>
-                <a:spcPts val="600"/>
-              </a:spcAft>
-            </a:pPr>
-            <a:r>
-              <a:rPr sz="1500">
-                <a:solidFill>
-                  <a:srgbClr val="22282E"/>
-                </a:solidFill>
-              </a:rPr>
-              <a:t>•  Construye una cadena que llame a mprotect para hacer ejecutable una región (ret2mprotect).</a:t>
-            </a:r>
-          </a:p>
-          <a:p>
-            <a:pPr>
-              <a:spcAft>
-                <a:spcPts val="600"/>
-              </a:spcAft>
-            </a:pPr>
-            <a:r>
-              <a:rPr sz="1500">
-                <a:solidFill>
-                  <a:srgbClr val="22282E"/>
-                </a:solidFill>
-              </a:rPr>
-              <a:t>•  Explica por qué ROP es Turing-completo con gadgets suficientes.</a:t>
-            </a:r>
-          </a:p>
-          <a:p>
-            <a:pPr>
-              <a:spcAft>
-                <a:spcPts val="600"/>
-              </a:spcAft>
-            </a:pPr>
-            <a:r>
-              <a:rPr sz="1500">
-                <a:solidFill>
-                  <a:srgbClr val="22282E"/>
-                </a:solidFill>
-              </a:rPr>
-              <a:t>•  Mide cuántos gadgets pop necesitas para 4 argumentos de syscall.</a:t>
+              <a:t>•  Usa un binario estático o con NX activo para practicar (gcc -static -fno-stack-protector -no-pie).</a:t>
             </a:r>
           </a:p>
         </p:txBody>
@@ -4763,7 +5124,7 @@
                   <a:srgbClr val="0B3D2E"/>
                 </a:solidFill>
               </a:rPr>
-              <a:t>📝 Reto verificable</a:t>
+              <a:t>🧪 Laboratorio guiado</a:t>
             </a:r>
           </a:p>
         </p:txBody>
@@ -4801,52 +5162,97 @@
                   <a:srgbClr val="22282E"/>
                 </a:solidFill>
               </a:rPr>
-              <a:t>•  Entrega un exploit ROP que ejecute execve("/bin/sh", NULL, NULL) mediante syscall contra tu binario</a:t>
-            </a:r>
-          </a:p>
-          <a:p>
-            <a:pPr>
-              <a:spcAft>
-                <a:spcPts val="600"/>
-              </a:spcAft>
-            </a:pPr>
-            <a:r>
-              <a:rPr sz="1500">
-                <a:solidFill>
-                  <a:srgbClr val="22282E"/>
-                </a:solidFill>
-              </a:rPr>
-              <a:t>•  estático, sin usar system de libc.</a:t>
-            </a:r>
-          </a:p>
-          <a:p>
-            <a:pPr>
-              <a:spcAft>
-                <a:spcPts val="600"/>
-              </a:spcAft>
-            </a:pPr>
-            <a:r>
-              <a:rPr sz="1500">
-                <a:solidFill>
-                  <a:srgbClr val="22282E"/>
-                </a:solidFill>
-              </a:rPr>
-              <a:t>•  Criterio de aceptación: obtienes shell interactiva; la cadena incluye gadgets pop rdi/rsi/rdx/rax</a:t>
-            </a:r>
-          </a:p>
-          <a:p>
-            <a:pPr>
-              <a:spcAft>
-                <a:spcPts val="600"/>
-              </a:spcAft>
-            </a:pPr>
-            <a:r>
-              <a:rPr sz="1500">
-                <a:solidFill>
-                  <a:srgbClr val="22282E"/>
-                </a:solidFill>
-              </a:rPr>
-              <a:t>•  y un syscall, verificable en el telescope de la cadena.</a:t>
+              <a:t>•  Compila un objetivo con muchos gadgets (binario estático):</a:t>
+            </a:r>
+          </a:p>
+          <a:p>
+            <a:pPr>
+              <a:spcAft>
+                <a:spcPts val="600"/>
+              </a:spcAft>
+            </a:pPr>
+            <a:r>
+              <a:rPr sz="1500">
+                <a:solidFill>
+                  <a:srgbClr val="22282E"/>
+                </a:solidFill>
+              </a:rPr>
+              <a:t>•  Busca gadgets clave:</a:t>
+            </a:r>
+          </a:p>
+          <a:p>
+            <a:pPr>
+              <a:spcAft>
+                <a:spcPts val="600"/>
+              </a:spcAft>
+            </a:pPr>
+            <a:r>
+              <a:rPr sz="1500">
+                <a:solidFill>
+                  <a:srgbClr val="22282E"/>
+                </a:solidFill>
+              </a:rPr>
+              <a:t>•  Construye una cadena execve("/bin/sh", 0, 0) a mano:</a:t>
+            </a:r>
+          </a:p>
+          <a:p>
+            <a:pPr>
+              <a:spcAft>
+                <a:spcPts val="600"/>
+              </a:spcAft>
+            </a:pPr>
+            <a:r>
+              <a:rPr sz="1500">
+                <a:solidFill>
+                  <a:srgbClr val="22282E"/>
+                </a:solidFill>
+              </a:rPr>
+              <a:t>•  pop rdi; ret → dirección de "/bin/sh"</a:t>
+            </a:r>
+          </a:p>
+          <a:p>
+            <a:pPr>
+              <a:spcAft>
+                <a:spcPts val="600"/>
+              </a:spcAft>
+            </a:pPr>
+            <a:r>
+              <a:rPr sz="1500">
+                <a:solidFill>
+                  <a:srgbClr val="22282E"/>
+                </a:solidFill>
+              </a:rPr>
+              <a:t>•  pop rsi; ret → 0</a:t>
+            </a:r>
+          </a:p>
+          <a:p>
+            <a:pPr>
+              <a:spcAft>
+                <a:spcPts val="600"/>
+              </a:spcAft>
+            </a:pPr>
+            <a:r>
+              <a:rPr sz="1500">
+                <a:solidFill>
+                  <a:srgbClr val="22282E"/>
+                </a:solidFill>
+              </a:rPr>
+              <a:t>•  pop rdx; ret → 0</a:t>
+            </a:r>
+          </a:p>
+          <a:p>
+            <a:pPr>
+              <a:spcAft>
+                <a:spcPts val="600"/>
+              </a:spcAft>
+            </a:pPr>
+            <a:r>
+              <a:rPr sz="1500">
+                <a:solidFill>
+                  <a:srgbClr val="22282E"/>
+                </a:solidFill>
+              </a:rPr>
+              <a:t>•  pop rax; ret → 59</a:t>
             </a:r>
           </a:p>
         </p:txBody>
